--- a/doc/InfoCAC-agents-QA.pptx
+++ b/doc/InfoCAC-agents-QA.pptx
@@ -117,7 +117,7 @@
   <p:extLst>
     <p:ext uri="{521415D9-36F7-43E2-AB2F-B90AF26B5E84}">
       <p14:sectionLst xmlns:p14="http://schemas.microsoft.com/office/powerpoint/2010/main">
-        <p14:section name="Agents" id="{bc0aa9c5-4c21-330e-2310-bef27f7f75f3}">
+        <p14:section name="Agents" id="{6606d440-b9e5-9f85-9897-4c923619dc44}">
           <p14:sldIdLst>
             <p14:sldId id="256"/>
             <p14:sldId id="257"/>
@@ -976,7 +976,7 @@
           <a:p>
             <a:r>
               <a:rPr lang="en-US" dirty="0"/>
-              <a:t>Relevé dans le fichier qc.agent.md du dépôt de l'équipe, sur les cas qu'il a produits pour l'US 417829 (Créer une nouvelle demande) et dans le retour d'équipe sur un autre projet. Le défaut le plus visible : chaque cas tient en trois lignes Given, When, Then, en anglais, sans dire avec quel rôle se connecter, sur quel écran partir ni quelles données préparer. Le testeur doit tout reconstituer. Le plus grave : quand l'US est floue, l'agent invente un résultat attendu, parce que ses consignes lui interdisent d'ajouter une section où poser une question. Le modèle ne se trompe pas au hasard : il reproduit l'exemple vague qu'on lui donne et applique la politique à la lettre. La version proposée garde la publication technique et réécrit l'analyse et la rédaction.</a:t>
+              <a:t>Sources : la sortie de l'agent pour l'US 417829 (cas TC-001 à TC-014, début de TC-015, et sa liste de cas UI), son fichier qc.agent.md (« l. » = numéro de ligne) et le retour d'équipe sur un autre projet. Les parties analyse, risques et cas limites de sa sortie n'ont pas été relues : on ne dit pas qu'il ignore les risques, seulement que son format ne prévoit aucune place pour une question au PO. Le défaut le plus visible : chaque cas tient en une ligne Given, When, Then, sans dire avec quel rôle se connecter, sur quel écran partir ni quelles données préparer. La règle la plus importante de l'US (§4 Validation) décrit cinq situations ; une seule est couverte dans les cas relus. Ses consignes imposent aussi de créer un plan de test pour chaque US et de ne publier que les cas de type Fonctionnel : les cas UI, comme l'erreur « Entité ID inconnue », ne sont jamais créés. La publication technique est bien outillée et est conservée.</a:t>
             </a:r>
             <a:endParaRPr lang="en-US" dirty="0"/>
           </a:p>
@@ -1064,7 +1064,7 @@
           <a:p>
             <a:r>
               <a:rPr lang="en-US" dirty="0"/>
-              <a:t>Comparaison faite sur la sortie de l'agent actuel (TC-001 à TC-014, début de TC-015) et sur le résultat de la version proposée appliquée à l'US complète. Sur l'accès, le panneau et les champs du formulaire, les deux couvertures sont proches. La différence est ailleurs. Exécutabilité : les cas actuels ne disent ni qui se connecte ni quelles données préparer. Règle métier : la validation dépend du statut de la demande existante sur l'entité (aucune ou Validé : création acceptée ; En cours, Retard, Révision : erreur) ; l'agent actuel n'en teste qu'un cas. Honnêteté : l'US dit qu'une entité inconnue est refusée alors que la saisie libre est impossible ; l'agent actuel ne le voit pas, la version proposée en fait une question bloquante, comme la liste des documents obligatoires. Volume : environ 15 cas actuels contre 23 lignes exécutables proposées, sans doublon : chaque ligne a sa raison. Les textes exacts des messages sont dans les maquettes, non fournies : ils restent à compléter.</a:t>
+              <a:t>Comparaison faite sur la sortie de l'agent actuel (TC-001 à TC-014, début de TC-015, liste des cas UI) et sur le résultat de la version proposée appliquée à l'US complète. Sur l'accès, le panneau et les champs du formulaire, les deux couvertures sont proches. La différence est ailleurs. Exécutabilité : les cas actuels ne disent ni qui se connecte ni quelles données préparer. Règle métier : la validation dépend du statut de la demande existante sur l'entité (aucune ou Validé : création acceptée ; En cours, Retard, Révision : erreur) ; l'agent actuel n'en teste qu'un cas. Ce que l'US ne dit pas : au §3, l'US annonce une erreur « entité ID inconnue » alors que l'entité ne peut pas être saisie librement ; l'agent actuel prévoit de tester ce message sans relever ce point, la version proposée en fait une question bloquante, comme la liste des documents obligatoires (§4). Millésime : les deux versions testent la valeur par défaut et la plage de -20 à +10 ans (TC-009, TC-010). Volume : environ 15 cas actuels contre 23 lignes exécutables proposées, sans doublon : chaque ligne a sa raison. Les textes exacts des messages sont dans les maquettes, non fournies : ils restent à compléter.</a:t>
             </a:r>
             <a:endParaRPr lang="en-US" dirty="0"/>
           </a:p>
@@ -1152,7 +1152,7 @@
           <a:p>
             <a:r>
               <a:rPr lang="en-US" dirty="0"/>
-              <a:t>Le contexte projet est un fichier du dépôt, relu par l'équipe et daté : rôles, comptes de test, statuts, règles déjà validées, données fictives, points à confirmer. Il répond au constat qu'une US traitée seule perd la cohérence avec les autres. L'analyse lit l'US phrase par phrase, donne un statut à chaque règle (rédigeable, à arbitrer, exploratoire), relève les préconditions et les combinaisons à tester, et rend un verdict qui dit quoi rédiger. La rédaction écrit en français toutes les préconditions en Étant donné, les actions en Quand et Et, les résultats exacts en Alors et Et, et seulement pour les règles rédigeables. Premier essai des nouvelles consignes sur l'US 417829, appliquées hors de l'outil de l'équipe : elles ont fait ressortir les deux parcours (Renouvellement, Nouveau), les trois rôles, les bornes du millésime, et une contradiction de l'US (une entité inconnue peut être refusée alors que la saisie libre est impossible), transformée en question au lieu d'un cas. Après chaque US, l'analyse propose des ajouts au contexte ; seuls ceux que la QC valide y entrent. Les 3 US de référence sont des US déjà traitées à la main : on connaît la bonne réponse, on peut juger l'agent. Données : le contenu des US, du PRD et du DAG est envoyé à l'outil IA ; à valider avec la politique IA de KPMG.</a:t>
+              <a:t>Le contexte projet est un fichier du dépôt, relu par l'équipe et daté : rôles, comptes de test, statuts, règles déjà validées, données fictives, points à confirmer. Il répond au constat qu'une US traitée seule perd la cohérence avec les autres. L'analyse lit l'US phrase par phrase, donne un statut à chaque règle (rédigeable, à arbitrer, exploratoire), relève les préconditions et les combinaisons à tester, et rend un verdict qui dit quoi rédiger. La rédaction écrit en français toutes les préconditions en Étant donné, les actions en Quand et Et, les résultats exacts en Alors et Et, et seulement pour les règles rédigeables. Premier essai des nouvelles consignes sur l'US 417829, appliquées hors de l'outil de l'équipe : elles couvrent les deux parcours (Renouvellement, Nouveau), les rôles, les cinq situations de la règle de validation (§4), et transforment en question un point ambigu de l'US (§3 : une erreur « entité ID inconnue » alors que l'entité ne peut pas être saisie librement) au lieu d'en faire un cas. Après chaque US, l'analyse propose des ajouts au contexte ; seuls ceux que la QC valide y entrent. Les 3 US de référence sont des US déjà traitées à la main : on connaît la bonne réponse, on peut juger l'agent. Données : le contenu des US, du PRD et du DAG est envoyé à l'outil IA ; à valider avec la politique IA de KPMG.</a:t>
             </a:r>
             <a:endParaRPr lang="en-US" dirty="0"/>
           </a:p>
@@ -5983,7 +5983,7 @@
                   <a:schemeClr val="accent3"/>
                 </a:solidFill>
               </a:rPr>
-              <a:t>Claude Code, agent du dépôt</a:t>
+              <a:t>Agent du dépôt GitHub ; version proposée pour Claude Code</a:t>
             </a:r>
             <a:endParaRPr lang="en-US" sz="1150" dirty="0"/>
           </a:p>
@@ -6898,7 +6898,7 @@
                   <a:schemeClr val="accent1"/>
                 </a:solidFill>
               </a:rPr>
-              <a:t>Relevé dans ses consignes, sa sortie pour l'US 417829 et les retours d'équipe.</a:t>
+              <a:t>Relevé dans sa sortie pour l'US 417829, ses consignes (qc.agent.md, « l. » = ligne) et les retours d'équipe.</a:t>
             </a:r>
             <a:endParaRPr lang="en-US" sz="1600" dirty="0"/>
           </a:p>
@@ -7007,7 +7007,7 @@
                             <a:srgbClr val="FFFFFF"/>
                           </a:solidFill>
                         </a:rPr>
-                        <a:t>La cause dans ses consignes</a:t>
+                        <a:t>La cause dans qc.agent.md</a:t>
                       </a:r>
                       <a:endParaRPr lang="en-US" sz="1200" dirty="0"/>
                     </a:p>
@@ -7131,7 +7131,7 @@
                             <a:srgbClr val="1A1A2E"/>
                           </a:solidFill>
                         </a:rPr>
-                        <a:t>Given, When, Then en anglais, une ligne chacun</a:t>
+                        <a:t>Une ligne Given, When, Then par cas, sans aucun Et (TC-001 à TC-014)</a:t>
                       </a:r>
                       <a:endParaRPr lang="en-US" sz="1100" dirty="0"/>
                     </a:p>
@@ -7192,7 +7192,7 @@
                             <a:srgbClr val="1A1A2E"/>
                           </a:solidFill>
                         </a:rPr>
-                        <a:t>L'exemple à copier utilise Given, When, Then ; aucune règle sur la langue</a:t>
+                        <a:t>Gherkin dans une cellule de tableau (l. 205-206) ; exemple en Given, When, Then (l. 232)</a:t>
                       </a:r>
                       <a:endParaRPr lang="en-US" sz="1100" dirty="0"/>
                     </a:p>
@@ -7316,7 +7316,7 @@
                             <a:srgbClr val="1A1A2E"/>
                           </a:solidFill>
                         </a:rPr>
-                        <a:t>Ni rôle connecté, ni écran, ni données : cas impossible à préparer</a:t>
+                        <a:t>Ni rôle, ni écran, ni données : « Given le formulaire de création ouvert » (TC-005)</a:t>
                       </a:r>
                       <a:endParaRPr lang="en-US" sz="1100" dirty="0"/>
                     </a:p>
@@ -7377,7 +7377,7 @@
                             <a:srgbClr val="1A1A2E"/>
                           </a:solidFill>
                         </a:rPr>
-                        <a:t>« Given un utilisateur actif » donné en exemple</a:t>
+                        <a:t>Exemple à copier : « Given un utilisateur actif » (l. 232)</a:t>
                       </a:r>
                       <a:endParaRPr lang="en-US" sz="1100" dirty="0"/>
                     </a:p>
@@ -7501,7 +7501,7 @@
                             <a:srgbClr val="1A1A2E"/>
                           </a:solidFill>
                         </a:rPr>
-                        <a:t>Des attendus inventés quand l'US est floue</a:t>
+                        <a:t>Pas de question au PO ; « anti double clic » ajouté alors que l'US n'en parle pas</a:t>
                       </a:r>
                       <a:endParaRPr lang="en-US" sz="1100" dirty="0"/>
                     </a:p>
@@ -7562,7 +7562,7 @@
                             <a:srgbClr val="1A1A2E"/>
                           </a:solidFill>
                         </a:rPr>
-                        <a:t>« N'ajoute aucune section » : pas de place pour « je ne sais pas »</a:t>
+                        <a:t>Structure fixe en 5 parties, aucune partie à ajouter (l. 207)</a:t>
                       </a:r>
                       <a:endParaRPr lang="en-US" sz="1100" dirty="0"/>
                     </a:p>
@@ -7686,7 +7686,7 @@
                             <a:srgbClr val="1A1A2E"/>
                           </a:solidFill>
                         </a:rPr>
-                        <a:t>« La demande est créée » : ni statut, ni message</a:t>
+                        <a:t>« Le collaborateur est affecté à la demande » avant sa création (TC-008)</a:t>
                       </a:r>
                       <a:endParaRPr lang="en-US" sz="1100" dirty="0"/>
                     </a:p>
@@ -7747,7 +7747,7 @@
                             <a:srgbClr val="1A1A2E"/>
                           </a:solidFill>
                         </a:rPr>
-                        <a:t>Exemple vague copié à la lettre</a:t>
+                        <a:t>Aucune règle sur le résultat attendu</a:t>
                       </a:r>
                       <a:endParaRPr lang="en-US" sz="1100" dirty="0"/>
                     </a:p>
@@ -7871,7 +7871,7 @@
                             <a:srgbClr val="1A1A2E"/>
                           </a:solidFill>
                         </a:rPr>
-                        <a:t>Variantes et bornes oubliées (nature, rôles, millésime)</a:t>
+                        <a:t>Règle de validation (US §4) : 1 situation sur 5 dans TC-001 à TC-015</a:t>
                       </a:r>
                       <a:endParaRPr lang="en-US" sz="1100" dirty="0"/>
                     </a:p>
@@ -7993,7 +7993,7 @@
                             <a:srgbClr val="00338D"/>
                           </a:solidFill>
                         </a:rPr>
-                        <a:t>Règles extraites de l'US, combinaisons, valeurs limites</a:t>
+                        <a:t>Règles extraites de l'US, une ligne par situation</a:t>
                       </a:r>
                       <a:endParaRPr lang="en-US" sz="1100" dirty="0"/>
                     </a:p>
@@ -8117,7 +8117,7 @@
                             <a:srgbClr val="1A1A2E"/>
                           </a:solidFill>
                         </a:rPr>
-                        <a:t>Il ne lit que l'US</a:t>
+                        <a:t>Lit le work item de l'US (l. 31) ; rien sur la Feature ni les cas existants</a:t>
                       </a:r>
                       <a:endParaRPr lang="en-US" sz="1100" dirty="0"/>
                     </a:p>
@@ -8241,7 +8241,7 @@
                             <a:srgbClr val="1A1A2E"/>
                           </a:solidFill>
                         </a:rPr>
-                        <a:t>Reprise Oui puis Non : même résultat, un cas de trop</a:t>
+                        <a:t>Reprise Oui puis Non : même résultat écrit (TC-013, TC-014)</a:t>
                       </a:r>
                       <a:endParaRPr lang="en-US" sz="1100" dirty="0"/>
                     </a:p>
@@ -8426,7 +8426,7 @@
                             <a:srgbClr val="1A1A2E"/>
                           </a:solidFill>
                         </a:rPr>
-                        <a:t>Publication automatique, un plan par US</a:t>
+                        <a:t>Un plan créé par US ; seuls les cas « Fonctionnel » publiés</a:t>
                       </a:r>
                       <a:endParaRPr lang="en-US" sz="1100" dirty="0"/>
                     </a:p>
@@ -8487,7 +8487,7 @@
                             <a:srgbClr val="1A1A2E"/>
                           </a:solidFill>
                         </a:rPr>
-                        <a:t>Publication obligatoire dans les consignes</a:t>
+                        <a:t>Création obligatoire dès qu'un ID est fourni (l. 51, 173) ; Fonctionnel seulement (l. 170)</a:t>
                       </a:r>
                       <a:endParaRPr lang="en-US" sz="1100" dirty="0"/>
                     </a:p>
@@ -8641,7 +8641,7 @@
                   <a:schemeClr val="tx1"/>
                 </a:solidFill>
               </a:rPr>
-              <a:t>la publication technique dans Azure DevOps et certains cas concrets, gardés tels quels.</a:t>
+              <a:t>une publication bien outillée (codes HTTP contrôlés, liens vérifiés) et certains cas concrets, gardés tels quels.</a:t>
             </a:r>
             <a:endParaRPr lang="en-US" sz="1200" dirty="0"/>
           </a:p>
@@ -9081,7 +9081,7 @@
                             <a:srgbClr val="1A1A2E"/>
                           </a:solidFill>
                         </a:rPr>
-                        <a:t>Une ligne Given, When, Then en anglais par cas ; « Fonctionnel » partout</a:t>
+                        <a:t>Une ligne Given, When, Then par cas ; « Fonctionnel » partout (TC-001 à TC-014)</a:t>
                       </a:r>
                       <a:endParaRPr lang="en-US" sz="1100" dirty="0"/>
                     </a:p>
@@ -9266,7 +9266,7 @@
                             <a:srgbClr val="1A1A2E"/>
                           </a:solidFill>
                         </a:rPr>
-                        <a:t>« Given le formulaire ouvert » : ni rôle, ni écran ; « une entité valide »</a:t>
+                        <a:t>« Given le formulaire de création ouvert » (TC-005) ; « une entité valide » (TC-013)</a:t>
                       </a:r>
                       <a:endParaRPr lang="en-US" sz="1100" dirty="0"/>
                     </a:p>
@@ -9327,7 +9327,7 @@
                             <a:srgbClr val="00338D"/>
                           </a:solidFill>
                         </a:rPr>
-                        <a:t>Rôle et compte, écran de départ, entité et statut de sa demande, documents joints</a:t>
+                        <a:t>Rôle et compte, écran de départ, entité et statut de sa demande</a:t>
                       </a:r>
                       <a:endParaRPr lang="en-US" sz="1100" dirty="0"/>
                     </a:p>
@@ -9390,7 +9390,7 @@
                             <a:srgbClr val="1A1A2E"/>
                           </a:solidFill>
                         </a:rPr>
-                        <a:t>Rôles</a:t>
+                        <a:t>Rôles (US §1)</a:t>
                       </a:r>
                       <a:endParaRPr lang="en-US" sz="1100" dirty="0"/>
                     </a:p>
@@ -9451,7 +9451,7 @@
                             <a:srgbClr val="1A1A2E"/>
                           </a:solidFill>
                         </a:rPr>
-                        <a:t>« un rôle autre qu'Admin ou SuperAdmin »</a:t>
+                        <a:t>« un rôle autre qu'Admin ou SuperAdmin » (TC-003)</a:t>
                       </a:r>
                       <a:endParaRPr lang="en-US" sz="1100" dirty="0"/>
                     </a:p>
@@ -9575,7 +9575,7 @@
                             <a:srgbClr val="1A1A2E"/>
                           </a:solidFill>
                         </a:rPr>
-                        <a:t>Règle de validation : statut de l'entité</a:t>
+                        <a:t>Règle de validation (US §4)</a:t>
                       </a:r>
                       <a:endParaRPr lang="en-US" sz="1100" dirty="0"/>
                     </a:p>
@@ -9636,7 +9636,7 @@
                             <a:srgbClr val="1A1A2E"/>
                           </a:solidFill>
                         </a:rPr>
-                        <a:t>1 cas sur 5 : entité sans demande</a:t>
+                        <a:t>1 situation sur 5 : entité sans demande (TC-012)</a:t>
                       </a:r>
                       <a:endParaRPr lang="en-US" sz="1100" dirty="0"/>
                     </a:p>
@@ -9697,7 +9697,7 @@
                             <a:srgbClr val="00338D"/>
                           </a:solidFill>
                         </a:rPr>
-                        <a:t>5 cas : aucune demande et Validé acceptés ; En cours, Retard, Révision refusés</a:t>
+                        <a:t>5 situations : 2 acceptées, 3 refusées, avec vérification que la demande existante ne change pas</a:t>
                       </a:r>
                       <a:endParaRPr lang="en-US" sz="1100" dirty="0"/>
                     </a:p>
@@ -9760,7 +9760,7 @@
                             <a:srgbClr val="1A1A2E"/>
                           </a:solidFill>
                         </a:rPr>
-                        <a:t>Champs obligatoires</a:t>
+                        <a:t>Champs obligatoires (US §3, §4)</a:t>
                       </a:r>
                       <a:endParaRPr lang="en-US" sz="1100" dirty="0"/>
                     </a:p>
@@ -9821,7 +9821,7 @@
                             <a:srgbClr val="1A1A2E"/>
                           </a:solidFill>
                         </a:rPr>
-                        <a:t>1 cas générique</a:t>
+                        <a:t>1 cas générique (TC-015)</a:t>
                       </a:r>
                       <a:endParaRPr lang="en-US" sz="1100" dirty="0"/>
                     </a:p>
@@ -9945,7 +9945,7 @@
                             <a:srgbClr val="1A1A2E"/>
                           </a:solidFill>
                         </a:rPr>
-                        <a:t>Bornes du millésime</a:t>
+                        <a:t>Ajouts absents de l'US</a:t>
                       </a:r>
                       <a:endParaRPr lang="en-US" sz="1100" dirty="0"/>
                     </a:p>
@@ -10006,7 +10006,7 @@
                             <a:srgbClr val="1A1A2E"/>
                           </a:solidFill>
                         </a:rPr>
-                        <a:t>1 cas « de -20 à +10 »</a:t>
+                        <a:t>« Désactivation du bouton pendant l'envoi (anti double clic) »</a:t>
                       </a:r>
                       <a:endParaRPr lang="en-US" sz="1100" dirty="0"/>
                     </a:p>
@@ -10067,7 +10067,7 @@
                             <a:srgbClr val="00338D"/>
                           </a:solidFill>
                         </a:rPr>
-                        <a:t>4 cas : les bornes et les valeurs juste au-delà</a:t>
+                        <a:t>Aucun</a:t>
                       </a:r>
                       <a:endParaRPr lang="en-US" sz="1100" dirty="0"/>
                     </a:p>
@@ -10130,7 +10130,7 @@
                             <a:srgbClr val="1A1A2E"/>
                           </a:solidFill>
                         </a:rPr>
-                        <a:t>Doublons</a:t>
+                        <a:t>Reprise (US §3)</a:t>
                       </a:r>
                       <a:endParaRPr lang="en-US" sz="1100" dirty="0"/>
                     </a:p>
@@ -10191,7 +10191,7 @@
                             <a:srgbClr val="1A1A2E"/>
                           </a:solidFill>
                         </a:rPr>
-                        <a:t>Reprise Oui et Reprise Non : même résultat</a:t>
+                        <a:t>TC-013 et TC-014 : même résultat écrit pour Oui et Non</a:t>
                       </a:r>
                       <a:endParaRPr lang="en-US" sz="1100" dirty="0"/>
                     </a:p>
@@ -10252,7 +10252,7 @@
                             <a:srgbClr val="00338D"/>
                           </a:solidFill>
                         </a:rPr>
-                        <a:t>Un cas par résultat distinct</a:t>
+                        <a:t>Affichage vérifié ; son effet, non décrit par l'US, n'est pas inventé</a:t>
                       </a:r>
                       <a:endParaRPr lang="en-US" sz="1100" dirty="0"/>
                     </a:p>
@@ -10376,7 +10376,7 @@
                             <a:srgbClr val="1A1A2E"/>
                           </a:solidFill>
                         </a:rPr>
-                        <a:t>Aucune question ; la contradiction sur l'entité inconnue n'est pas vue</a:t>
+                        <a:t>Aucune question ; l'erreur « Entité ID inconnue » prévue en test UI sans relever que la saisie libre est impossible (TC-011)</a:t>
                       </a:r>
                       <a:endParaRPr lang="en-US" sz="1100" dirty="0"/>
                     </a:p>
@@ -10437,7 +10437,7 @@
                             <a:srgbClr val="00338D"/>
                           </a:solidFill>
                         </a:rPr>
-                        <a:t>9 questions au PO, dont 2 bloquantes (entité inconnue, documents)</a:t>
+                        <a:t>9 questions au PO, dont 2 bloquantes : Entité ID inconnue (§3), documents obligatoires (§4)</a:t>
                       </a:r>
                       <a:endParaRPr lang="en-US" sz="1100" dirty="0"/>
                     </a:p>
@@ -11290,7 +11290,7 @@
                   <a:schemeClr val="bg1"/>
                 </a:solidFill>
               </a:rPr>
-              <a:t>Premier essai des consignes sur l'US 417829, hors de l'outil de l'équipe : variantes, bornes et une contradiction repérées</a:t>
+              <a:t>Premier essai des consignes sur l'US 417829, hors de l'outil de l'équipe : 5 situations de validation couvertes, 9 questions au PO</a:t>
             </a:r>
             <a:endParaRPr lang="en-US" sz="1250" dirty="0"/>
           </a:p>

--- a/doc/InfoCAC-agents-QA.pptx
+++ b/doc/InfoCAC-agents-QA.pptx
@@ -117,7 +117,7 @@
   <p:extLst>
     <p:ext uri="{521415D9-36F7-43E2-AB2F-B90AF26B5E84}">
       <p14:sectionLst xmlns:p14="http://schemas.microsoft.com/office/powerpoint/2010/main">
-        <p14:section name="Agents" id="{6606d440-b9e5-9f85-9897-4c923619dc44}">
+        <p14:section name="Agents" id="{e859a0e4-b330-18cb-f317-516297ad3725}">
           <p14:sldIdLst>
             <p14:sldId id="256"/>
             <p14:sldId id="257"/>
@@ -1064,7 +1064,7 @@
           <a:p>
             <a:r>
               <a:rPr lang="en-US" dirty="0"/>
-              <a:t>Comparaison faite sur la sortie de l'agent actuel (TC-001 à TC-014, début de TC-015, liste des cas UI) et sur le résultat de la version proposée appliquée à l'US complète. Sur l'accès, le panneau et les champs du formulaire, les deux couvertures sont proches. La différence est ailleurs. Exécutabilité : les cas actuels ne disent ni qui se connecte ni quelles données préparer. Règle métier : la validation dépend du statut de la demande existante sur l'entité (aucune ou Validé : création acceptée ; En cours, Retard, Révision : erreur) ; l'agent actuel n'en teste qu'un cas. Ce que l'US ne dit pas : au §3, l'US annonce une erreur « entité ID inconnue » alors que l'entité ne peut pas être saisie librement ; l'agent actuel prévoit de tester ce message sans relever ce point, la version proposée en fait une question bloquante, comme la liste des documents obligatoires (§4). Millésime : les deux versions testent la valeur par défaut et la plage de -20 à +10 ans (TC-009, TC-010). Volume : environ 15 cas actuels contre 23 lignes exécutables proposées, sans doublon : chaque ligne a sa raison. Les textes exacts des messages sont dans les maquettes, non fournies : ils restent à compléter.</a:t>
+              <a:t>Comparaison faite sur la sortie de l'agent actuel (TC-001 à TC-014, début de TC-015, liste des cas UI) et sur le résultat de la version proposée appliquée à l'US complète. Sur l'accès, le panneau et les champs du formulaire, les deux couvertures sont proches. La différence est ailleurs. Exécutabilité : les cas actuels ne disent ni qui se connecte ni quelles données préparer. Règle métier : la validation dépend du statut de la demande existante sur l'entité (aucune ou Validé : création acceptée ; En cours, Retard, Révision : erreur) ; l'agent actuel n'en teste qu'un cas. Ce que l'US ne dit pas : au §3, l'US annonce une erreur « entité ID inconnue » alors que l'entité ne peut pas être saisie librement ; l'agent actuel prévoit de tester ce message sans relever ce point, la version proposée en fait une question bloquante, comme la liste des documents obligatoires (§4). Millésime : les deux versions testent la valeur par défaut et la plage de -20 à +10 ans (TC-009, TC-010). Volume : au moins 15 cas actuels contre 22 cas exécutables pour le nouvel agent, 0 erreur au contrôle. Les textes exacts des messages sont dans les maquettes, non fournies : ils restent à compléter.</a:t>
             </a:r>
             <a:endParaRPr lang="en-US" dirty="0"/>
           </a:p>
@@ -1152,7 +1152,7 @@
           <a:p>
             <a:r>
               <a:rPr lang="en-US" dirty="0"/>
-              <a:t>Le contexte projet est un fichier du dépôt, relu par l'équipe et daté : rôles, comptes de test, statuts, règles déjà validées, données fictives, points à confirmer. Il répond au constat qu'une US traitée seule perd la cohérence avec les autres. L'analyse lit l'US phrase par phrase, donne un statut à chaque règle (rédigeable, à arbitrer, exploratoire), relève les préconditions et les combinaisons à tester, et rend un verdict qui dit quoi rédiger. La rédaction écrit en français toutes les préconditions en Étant donné, les actions en Quand et Et, les résultats exacts en Alors et Et, et seulement pour les règles rédigeables. Premier essai des nouvelles consignes sur l'US 417829, appliquées hors de l'outil de l'équipe : elles couvrent les deux parcours (Renouvellement, Nouveau), les rôles, les cinq situations de la règle de validation (§4), et transforment en question un point ambigu de l'US (§3 : une erreur « entité ID inconnue » alors que l'entité ne peut pas être saisie librement) au lieu d'en faire un cas. Après chaque US, l'analyse propose des ajouts au contexte ; seuls ceux que la QC valide y entrent. Les 3 US de référence sont des US déjà traitées à la main : on connaît la bonne réponse, on peut juger l'agent. Données : le contenu des US, du PRD et du DAG est envoyé à l'outil IA ; à valider avec la politique IA de KPMG.</a:t>
+              <a:t>Le contexte projet est un fichier du dépôt, relu par l'équipe et daté : rôles, comptes de test, statuts, règles déjà validées, données fictives, points à confirmer. Il répond au constat qu'une US traitée seule perd la cohérence avec les autres. L'analyse lit l'US phrase par phrase, donne un statut à chaque règle (rédigeable, à arbitrer, exploratoire), relève les préconditions et les combinaisons à tester, et rend un verdict qui dit quoi rédiger. La rédaction écrit en français toutes les préconditions en Étant donné, les actions en Quand et Et, les résultats exacts en Alors et Et, et seulement pour les règles rédigeables. Essai du nouvel agent dans Claude Code sur l'US 417829, avec le même modèle que l'agent actuel (Claude Sonnet 5.5) : 22 cas, 0 erreur au contrôle ; il couvre les deux parcours (Renouvellement, Nouveau), les rôles, les cinq situations de la règle de validation (§4), et transforme en question un point ambigu de l'US (§3 : une erreur « entité ID inconnue » alors que l'entité ne peut pas être saisie librement) au lieu d'en faire un cas. Après chaque US, l'analyse propose des ajouts au contexte ; seuls ceux que la QC valide y entrent. Les 3 US de référence sont des US déjà traitées à la main : on connaît la bonne réponse, on peut juger l'agent. Données : le contenu des US, du PRD et du DAG est envoyé à l'outil IA ; à valider avec la politique IA de KPMG.</a:t>
             </a:r>
             <a:endParaRPr lang="en-US" dirty="0"/>
           </a:p>
@@ -8787,7 +8787,7 @@
                   <a:schemeClr val="accent1"/>
                 </a:solidFill>
               </a:rPr>
-              <a:t>US 417829 : la sortie de l'agent actuel comparée à celle de la version proposée.</a:t>
+              <a:t>US 417829, même modèle (Claude Sonnet 5.5) : l'agent actuel face au nouvel agent lancé dans Claude Code.</a:t>
             </a:r>
             <a:endParaRPr lang="en-US" sz="1600" dirty="0"/>
           </a:p>
@@ -8957,7 +8957,7 @@
                             <a:srgbClr val="FFFFFF"/>
                           </a:solidFill>
                         </a:rPr>
-                        <a:t>Version proposée</a:t>
+                        <a:t>Nouvel agent</a:t>
                       </a:r>
                       <a:endParaRPr lang="en-US" sz="1200" dirty="0"/>
                     </a:p>
@@ -9882,7 +9882,7 @@
                             <a:srgbClr val="00338D"/>
                           </a:solidFill>
                         </a:rPr>
-                        <a:t>1 cas par champ, avec « aucune demande créée »</a:t>
+                        <a:t>1 cas par champ sans valeur par défaut (2), avec « aucune demande créée »</a:t>
                       </a:r>
                       <a:endParaRPr lang="en-US" sz="1100" dirty="0"/>
                     </a:p>
@@ -10252,7 +10252,7 @@
                             <a:srgbClr val="00338D"/>
                           </a:solidFill>
                         </a:rPr>
-                        <a:t>Affichage vérifié ; son effet, non décrit par l'US, n'est pas inventé</a:t>
+                        <a:t>Valeurs Oui et Non vérifiées ; son effet, non décrit par l'US, n'est pas inventé</a:t>
                       </a:r>
                       <a:endParaRPr lang="en-US" sz="1100" dirty="0"/>
                     </a:p>
@@ -10437,7 +10437,7 @@
                             <a:srgbClr val="00338D"/>
                           </a:solidFill>
                         </a:rPr>
-                        <a:t>9 questions au PO, dont 2 bloquantes : Entité ID inconnue (§3), documents obligatoires (§4)</a:t>
+                        <a:t>12 questions au PO, dont 6 bloquantes, parmi lesquelles Entité ID inconnue (§3) et documents obligatoires (§4)</a:t>
                       </a:r>
                       <a:endParaRPr lang="en-US" sz="1100" dirty="0"/>
                     </a:p>
@@ -10519,7 +10519,7 @@
                   <a:srgbClr val="00338D"/>
                 </a:solidFill>
               </a:rPr>
-              <a:t>Gardé de l'agent actuel : </a:t>
+              <a:t>À reprendre de l'agent actuel : </a:t>
             </a:r>
             <a:pPr indent="0" marL="0">
               <a:buNone/>
@@ -10530,7 +10530,7 @@
                   <a:schemeClr val="tx1"/>
                 </a:solidFill>
               </a:rPr>
-              <a:t>Reprise absente en Renouvellement, valeur par défaut concrète, ouverture du panneau, recherche d'un collaborateur.</a:t>
+              <a:t>vérifier que Reprise est absent en Renouvellement (TC-005), un nom concret par défaut (TC-007).</a:t>
             </a:r>
             <a:endParaRPr lang="en-US" sz="1200" dirty="0"/>
           </a:p>
@@ -11290,7 +11290,7 @@
                   <a:schemeClr val="bg1"/>
                 </a:solidFill>
               </a:rPr>
-              <a:t>Premier essai des consignes sur l'US 417829, hors de l'outil de l'équipe : 5 situations de validation couvertes, 9 questions au PO</a:t>
+              <a:t>Nouvel agent lancé dans Claude Code sur l'US 417829 : 22 cas, 5 situations de validation sur 5, 12 questions au PO</a:t>
             </a:r>
             <a:endParaRPr lang="en-US" sz="1250" dirty="0"/>
           </a:p>

--- a/doc/InfoCAC-agents-QA.pptx
+++ b/doc/InfoCAC-agents-QA.pptx
@@ -117,7 +117,7 @@
   <p:extLst>
     <p:ext uri="{521415D9-36F7-43E2-AB2F-B90AF26B5E84}">
       <p14:sectionLst xmlns:p14="http://schemas.microsoft.com/office/powerpoint/2010/main">
-        <p14:section name="Agents" id="{e859a0e4-b330-18cb-f317-516297ad3725}">
+        <p14:section name="Agents" id="{24f092af-0865-ccaf-4718-5838d79ee1cd}">
           <p14:sldIdLst>
             <p14:sldId id="256"/>
             <p14:sldId id="257"/>
@@ -1064,7 +1064,7 @@
           <a:p>
             <a:r>
               <a:rPr lang="en-US" dirty="0"/>
-              <a:t>Comparaison faite sur la sortie de l'agent actuel (TC-001 à TC-014, début de TC-015, liste des cas UI) et sur le résultat de la version proposée appliquée à l'US complète. Sur l'accès, le panneau et les champs du formulaire, les deux couvertures sont proches. La différence est ailleurs. Exécutabilité : les cas actuels ne disent ni qui se connecte ni quelles données préparer. Règle métier : la validation dépend du statut de la demande existante sur l'entité (aucune ou Validé : création acceptée ; En cours, Retard, Révision : erreur) ; l'agent actuel n'en teste qu'un cas. Ce que l'US ne dit pas : au §3, l'US annonce une erreur « entité ID inconnue » alors que l'entité ne peut pas être saisie librement ; l'agent actuel prévoit de tester ce message sans relever ce point, la version proposée en fait une question bloquante, comme la liste des documents obligatoires (§4). Millésime : les deux versions testent la valeur par défaut et la plage de -20 à +10 ans (TC-009, TC-010). Volume : au moins 15 cas actuels contre 22 cas exécutables pour le nouvel agent, 0 erreur au contrôle. Les textes exacts des messages sont dans les maquettes, non fournies : ils restent à compléter.</a:t>
+              <a:t>Comparaison faite sur la sortie de l'agent actuel (TC-001 à TC-014, début de TC-015, liste des cas UI) et sur le résultat de la version proposée appliquée à l'US complète. Sur l'accès, le panneau et les champs du formulaire, les deux couvertures sont proches. La différence est ailleurs. Exécutabilité : les cas actuels ne disent ni qui se connecte ni quelles données préparer. Règle métier : la validation dépend du statut de la demande existante sur l'entité (aucune ou Validé : création acceptée ; En cours, Retard, Révision : erreur) ; l'agent actuel n'en teste qu'un cas. Ce que l'US ne dit pas : au §3, l'US annonce une erreur « entité ID inconnue » alors que l'entité ne peut pas être saisie librement ; l'agent actuel prévoit de tester ce message sans relever ce point, la version proposée en fait une question bloquante, comme la liste des documents obligatoires (§4). Millésime : les deux versions testent la valeur par défaut et la plage de -20 à +10 ans (TC-009, TC-010). Volume : au moins 15 cas actuels contre 25 cas exécutables pour le nouvel agent (lancement du 27/10), 0 erreur au contrôle. Les textes exacts des messages sont dans les maquettes, non fournies : ils restent à compléter.</a:t>
             </a:r>
             <a:endParaRPr lang="en-US" dirty="0"/>
           </a:p>
@@ -1152,7 +1152,7 @@
           <a:p>
             <a:r>
               <a:rPr lang="en-US" dirty="0"/>
-              <a:t>Le contexte projet est un fichier du dépôt, relu par l'équipe et daté : rôles, comptes de test, statuts, règles déjà validées, données fictives, points à confirmer. Il répond au constat qu'une US traitée seule perd la cohérence avec les autres. L'analyse lit l'US phrase par phrase, donne un statut à chaque règle (rédigeable, à arbitrer, exploratoire), relève les préconditions et les combinaisons à tester, et rend un verdict qui dit quoi rédiger. La rédaction écrit en français toutes les préconditions en Étant donné, les actions en Quand et Et, les résultats exacts en Alors et Et, et seulement pour les règles rédigeables. Essai du nouvel agent dans Claude Code sur l'US 417829, avec le même modèle que l'agent actuel (Claude Sonnet 5.5) : 22 cas, 0 erreur au contrôle ; il couvre les deux parcours (Renouvellement, Nouveau), les rôles, les cinq situations de la règle de validation (§4), et transforme en question un point ambigu de l'US (§3 : une erreur « entité ID inconnue » alors que l'entité ne peut pas être saisie librement) au lieu d'en faire un cas. Après chaque US, l'analyse propose des ajouts au contexte ; seuls ceux que la QC valide y entrent. Les 3 US de référence sont des US déjà traitées à la main : on connaît la bonne réponse, on peut juger l'agent. Données : le contenu des US, du PRD et du DAG est envoyé à l'outil IA ; à valider avec la politique IA de KPMG.</a:t>
+              <a:t>Le contexte projet est un fichier du dépôt, relu par l'équipe et daté : rôles, comptes de test, statuts, règles déjà validées, données fictives, points à confirmer. Il répond au constat qu'une US traitée seule perd la cohérence avec les autres. L'analyse lit l'US phrase par phrase, donne un statut à chaque règle (rédigeable, à arbitrer, exploratoire), relève les préconditions et les combinaisons à tester, et rend un verdict qui dit quoi rédiger. La rédaction écrit en français toutes les préconditions en Étant donné, les actions en Quand et Et, les résultats exacts en Alors et Et, et seulement pour les règles rédigeables. Essai du nouvel agent dans Claude Code sur l'US 417829, avec le même modèle que l'agent actuel (Claude Sonnet 5.5) : 25 cas, 0 erreur au contrôle ; il couvre les deux parcours (Renouvellement, Nouveau), les rôles, les cinq situations de la règle de validation (§4), et transforme en question un point ambigu de l'US (§3 : une erreur « entité ID inconnue » alors que l'entité ne peut pas être saisie librement) au lieu d'en faire un cas. Après chaque US, l'analyse propose des ajouts au contexte ; seuls ceux que la QC valide y entrent. Les 3 US de référence sont des US déjà traitées à la main : on connaît la bonne réponse, on peut juger l'agent. Données : le contenu des US, du PRD et du DAG est envoyé à l'outil IA ; à valider avec la politique IA de KPMG.</a:t>
             </a:r>
             <a:endParaRPr lang="en-US" dirty="0"/>
           </a:p>
@@ -9697,7 +9697,7 @@
                             <a:srgbClr val="00338D"/>
                           </a:solidFill>
                         </a:rPr>
-                        <a:t>5 situations : 2 acceptées, 3 refusées, avec vérification que la demande existante ne change pas</a:t>
+                        <a:t>5 situations sur 5, dans les deux natures : 4 créations, 4 refus, la demande existante vérifiée inchangée</a:t>
                       </a:r>
                       <a:endParaRPr lang="en-US" sz="1100" dirty="0"/>
                     </a:p>
@@ -9882,7 +9882,7 @@
                             <a:srgbClr val="00338D"/>
                           </a:solidFill>
                         </a:rPr>
-                        <a:t>1 cas par champ sans valeur par défaut (2), avec « aucune demande créée »</a:t>
+                        <a:t>N° Requête BSC vide : refus et « aucune demande n'est créée » ; les autres champs ont une valeur par défaut</a:t>
                       </a:r>
                       <a:endParaRPr lang="en-US" sz="1100" dirty="0"/>
                     </a:p>
@@ -10252,7 +10252,7 @@
                             <a:srgbClr val="00338D"/>
                           </a:solidFill>
                         </a:rPr>
-                        <a:t>Valeurs Oui et Non vérifiées ; son effet, non décrit par l'US, n'est pas inventé</a:t>
+                        <a:t>Absent en Renouvellement, Oui et Non en Nouveau ; son effet, non décrit par l'US, n'est pas inventé</a:t>
                       </a:r>
                       <a:endParaRPr lang="en-US" sz="1100" dirty="0"/>
                     </a:p>
@@ -10437,7 +10437,7 @@
                             <a:srgbClr val="00338D"/>
                           </a:solidFill>
                         </a:rPr>
-                        <a:t>12 questions au PO, dont 6 bloquantes, parmi lesquelles Entité ID inconnue (§3) et documents obligatoires (§4)</a:t>
+                        <a:t>14 questions au PO, dont 4 bloquantes : Entité ID inconnue (§3), documents obligatoires (§4), millésime en Nouveau</a:t>
                       </a:r>
                       <a:endParaRPr lang="en-US" sz="1100" dirty="0"/>
                     </a:p>
@@ -10519,7 +10519,7 @@
                   <a:srgbClr val="00338D"/>
                 </a:solidFill>
               </a:rPr>
-              <a:t>À reprendre de l'agent actuel : </a:t>
+              <a:t>Repris de l'agent actuel : </a:t>
             </a:r>
             <a:pPr indent="0" marL="0">
               <a:buNone/>
@@ -10530,7 +10530,7 @@
                   <a:schemeClr val="tx1"/>
                 </a:solidFill>
               </a:rPr>
-              <a:t>vérifier que Reprise est absent en Renouvellement (TC-005), un nom concret par défaut (TC-007).</a:t>
+              <a:t>Reprise absent en Renouvellement (TC-005), nom concret par défaut (TC-007), saisie libre de l'entité interdite (TC-011).</a:t>
             </a:r>
             <a:endParaRPr lang="en-US" sz="1200" dirty="0"/>
           </a:p>
@@ -11290,7 +11290,7 @@
                   <a:schemeClr val="bg1"/>
                 </a:solidFill>
               </a:rPr>
-              <a:t>Nouvel agent lancé dans Claude Code sur l'US 417829 : 22 cas, 5 situations de validation sur 5, 12 questions au PO</a:t>
+              <a:t>Nouvel agent lancé dans Claude Code sur l'US 417829 : 25 cas, 5 situations de validation sur 5, 14 questions au PO</a:t>
             </a:r>
             <a:endParaRPr lang="en-US" sz="1250" dirty="0"/>
           </a:p>
@@ -11309,7 +11309,7 @@
                   <a:schemeClr val="bg1"/>
                 </a:solidFill>
               </a:rPr>
-              <a:t>Rejouer sur 3 US déjà traitées à la main, comparer critère par critère</a:t>
+              <a:t>Rejouer sur 3 US déjà traitées à la main, deux fois chacune, comparer critère par critère</a:t>
             </a:r>
             <a:endParaRPr lang="en-US" sz="1250" dirty="0"/>
           </a:p>
